--- a/presentation.pptx
+++ b/presentation.pptx
@@ -42433,7 +42433,7 @@
         </p:nvSpPr>
         <p:spPr>
           <a:xfrm>
-            <a:off x="201168" y="731520"/>
+            <a:off x="201168" y="645021"/>
             <a:ext cx="8741664" cy="256032"/>
           </a:xfrm>
           <a:prstGeom prst="rect">
@@ -44376,7 +44376,7 @@
         </p:nvSpPr>
         <p:spPr>
           <a:xfrm>
-            <a:off x="4663440" y="731520"/>
+            <a:off x="4663440" y="925113"/>
             <a:ext cx="45720" cy="237744"/>
           </a:xfrm>
           <a:prstGeom prst="rect">
@@ -44438,7 +44438,7 @@
         </p:nvSpPr>
         <p:spPr>
           <a:xfrm>
-            <a:off x="4773168" y="731520"/>
+            <a:off x="4773168" y="925113"/>
             <a:ext cx="3657600" cy="237744"/>
           </a:xfrm>
           <a:prstGeom prst="rect">
@@ -44510,7 +44510,7 @@
         </p:nvSpPr>
         <p:spPr>
           <a:xfrm>
-            <a:off x="4663440" y="987552"/>
+            <a:off x="4663440" y="1181145"/>
             <a:ext cx="4279392" cy="1417320"/>
           </a:xfrm>
           <a:prstGeom prst="rect">
@@ -44572,7 +44572,7 @@
         </p:nvSpPr>
         <p:spPr>
           <a:xfrm>
-            <a:off x="4773168" y="1078992"/>
+            <a:off x="4773168" y="1272585"/>
             <a:ext cx="4096512" cy="1289304"/>
           </a:xfrm>
           <a:prstGeom prst="rect">
@@ -44844,7 +44844,7 @@
         </p:nvSpPr>
         <p:spPr>
           <a:xfrm>
-            <a:off x="4663440" y="2450592"/>
+            <a:off x="4663440" y="2644185"/>
             <a:ext cx="4279392" cy="1417320"/>
           </a:xfrm>
           <a:prstGeom prst="rect">
@@ -44906,7 +44906,7 @@
         </p:nvSpPr>
         <p:spPr>
           <a:xfrm>
-            <a:off x="4773168" y="2542032"/>
+            <a:off x="4773168" y="2735625"/>
             <a:ext cx="4096512" cy="1289304"/>
           </a:xfrm>
           <a:prstGeom prst="rect">
@@ -45178,7 +45178,7 @@
         </p:nvSpPr>
         <p:spPr>
           <a:xfrm>
-            <a:off x="4663440" y="3968496"/>
+            <a:off x="4663440" y="4162089"/>
             <a:ext cx="45720" cy="237744"/>
           </a:xfrm>
           <a:prstGeom prst="rect">
@@ -45240,7 +45240,7 @@
         </p:nvSpPr>
         <p:spPr>
           <a:xfrm>
-            <a:off x="4773168" y="3968496"/>
+            <a:off x="4773168" y="4162089"/>
             <a:ext cx="3657600" cy="237744"/>
           </a:xfrm>
           <a:prstGeom prst="rect">
@@ -45312,7 +45312,7 @@
         </p:nvSpPr>
         <p:spPr>
           <a:xfrm>
-            <a:off x="4663440" y="4224528"/>
+            <a:off x="4663440" y="4418121"/>
             <a:ext cx="4279392" cy="658368"/>
           </a:xfrm>
           <a:prstGeom prst="rect">
@@ -46809,7 +46809,7 @@
         </p:nvSpPr>
         <p:spPr>
           <a:xfrm>
-            <a:off x="5486400" y="731520"/>
+            <a:off x="5486400" y="916875"/>
             <a:ext cx="45720" cy="237744"/>
           </a:xfrm>
           <a:prstGeom prst="rect">
@@ -46871,7 +46871,7 @@
         </p:nvSpPr>
         <p:spPr>
           <a:xfrm>
-            <a:off x="5596128" y="731520"/>
+            <a:off x="5596128" y="916875"/>
             <a:ext cx="3657600" cy="237744"/>
           </a:xfrm>
           <a:prstGeom prst="rect">
@@ -46943,7 +46943,7 @@
         </p:nvSpPr>
         <p:spPr>
           <a:xfrm>
-            <a:off x="5486400" y="987552"/>
+            <a:off x="5486400" y="1172907"/>
             <a:ext cx="3456432" cy="621792"/>
           </a:xfrm>
           <a:prstGeom prst="rect">
@@ -47005,7 +47005,7 @@
         </p:nvSpPr>
         <p:spPr>
           <a:xfrm>
-            <a:off x="5486400" y="987552"/>
+            <a:off x="5486400" y="1172907"/>
             <a:ext cx="45720" cy="621792"/>
           </a:xfrm>
           <a:prstGeom prst="rect">
@@ -47067,7 +47067,7 @@
         </p:nvSpPr>
         <p:spPr>
           <a:xfrm>
-            <a:off x="5596128" y="1042416"/>
+            <a:off x="5596128" y="1227771"/>
             <a:ext cx="3310128" cy="201168"/>
           </a:xfrm>
           <a:prstGeom prst="rect">
@@ -47139,7 +47139,7 @@
         </p:nvSpPr>
         <p:spPr>
           <a:xfrm>
-            <a:off x="5596128" y="1243584"/>
+            <a:off x="5596128" y="1428939"/>
             <a:ext cx="3310128" cy="310896"/>
           </a:xfrm>
           <a:prstGeom prst="rect">
@@ -47273,7 +47273,7 @@
         </p:nvSpPr>
         <p:spPr>
           <a:xfrm>
-            <a:off x="5486400" y="1700784"/>
+            <a:off x="5486400" y="1886139"/>
             <a:ext cx="45720" cy="621792"/>
           </a:xfrm>
           <a:prstGeom prst="rect">
@@ -47335,7 +47335,7 @@
         </p:nvSpPr>
         <p:spPr>
           <a:xfrm>
-            <a:off x="5596128" y="1755648"/>
+            <a:off x="5596128" y="1941003"/>
             <a:ext cx="3310128" cy="201168"/>
           </a:xfrm>
           <a:prstGeom prst="rect">
@@ -47407,7 +47407,7 @@
         </p:nvSpPr>
         <p:spPr>
           <a:xfrm>
-            <a:off x="5596128" y="1956816"/>
+            <a:off x="5596128" y="2142171"/>
             <a:ext cx="3310128" cy="310896"/>
           </a:xfrm>
           <a:prstGeom prst="rect">
@@ -47541,7 +47541,7 @@
         </p:nvSpPr>
         <p:spPr>
           <a:xfrm>
-            <a:off x="5486400" y="2414016"/>
+            <a:off x="5486400" y="2599371"/>
             <a:ext cx="45720" cy="621792"/>
           </a:xfrm>
           <a:prstGeom prst="rect">
@@ -47603,7 +47603,7 @@
         </p:nvSpPr>
         <p:spPr>
           <a:xfrm>
-            <a:off x="5596128" y="2468880"/>
+            <a:off x="5596128" y="2654235"/>
             <a:ext cx="3310128" cy="201168"/>
           </a:xfrm>
           <a:prstGeom prst="rect">
@@ -47675,7 +47675,7 @@
         </p:nvSpPr>
         <p:spPr>
           <a:xfrm>
-            <a:off x="5596128" y="2670048"/>
+            <a:off x="5596128" y="2855403"/>
             <a:ext cx="3310128" cy="310896"/>
           </a:xfrm>
           <a:prstGeom prst="rect">
@@ -47747,7 +47747,7 @@
         </p:nvSpPr>
         <p:spPr>
           <a:xfrm>
-            <a:off x="5486400" y="3154680"/>
+            <a:off x="5486400" y="3340035"/>
             <a:ext cx="45720" cy="237744"/>
           </a:xfrm>
           <a:prstGeom prst="rect">
@@ -47809,7 +47809,7 @@
         </p:nvSpPr>
         <p:spPr>
           <a:xfrm>
-            <a:off x="5596128" y="3154680"/>
+            <a:off x="5596128" y="3340035"/>
             <a:ext cx="3657600" cy="237744"/>
           </a:xfrm>
           <a:prstGeom prst="rect">
@@ -47881,7 +47881,7 @@
         </p:nvSpPr>
         <p:spPr>
           <a:xfrm>
-            <a:off x="5486400" y="3401568"/>
+            <a:off x="5486400" y="3586923"/>
             <a:ext cx="3456432" cy="822960"/>
           </a:xfrm>
           <a:prstGeom prst="rect">
@@ -47953,7 +47953,7 @@
         </p:nvSpPr>
         <p:spPr>
           <a:xfrm>
-            <a:off x="5486400" y="4315968"/>
+            <a:off x="5486400" y="4501323"/>
             <a:ext cx="45720" cy="237744"/>
           </a:xfrm>
           <a:prstGeom prst="rect">
@@ -48015,7 +48015,7 @@
         </p:nvSpPr>
         <p:spPr>
           <a:xfrm>
-            <a:off x="5596128" y="4315968"/>
+            <a:off x="5596128" y="4501323"/>
             <a:ext cx="3657600" cy="237744"/>
           </a:xfrm>
           <a:prstGeom prst="rect">
@@ -48087,7 +48087,7 @@
         </p:nvSpPr>
         <p:spPr>
           <a:xfrm>
-            <a:off x="5486400" y="4553712"/>
+            <a:off x="5486400" y="4739067"/>
             <a:ext cx="3456432" cy="411480"/>
           </a:xfrm>
           <a:prstGeom prst="rect">
